--- a/docs/Aged_Ticket_Advisor_Detailed.pptx
+++ b/docs/Aged_Ticket_Advisor_Detailed.pptx
@@ -5736,7 +5736,7 @@
                 </a:solidFill>
                 <a:latin typeface="Segoe UI"/>
               </a:rPr>
-              <a:t>Time since the last real Service Desk action</a:t>
+              <a:t>Time since the last real action by the assigned team</a:t>
             </a:r>
           </a:p>
         </p:txBody>
@@ -12737,7 +12737,7 @@
                           </a:solidFill>
                           <a:latin typeface="Segoe UI"/>
                         </a:rPr>
-                        <a:t>No real Service Desk action past the threshold</a:t>
+                        <a:t>No real action by the assigned team past the threshold</a:t>
                       </a:r>
                     </a:p>
                   </a:txBody>
@@ -17537,7 +17537,7 @@
                           </a:solidFill>
                           <a:latin typeface="Segoe UI"/>
                         </a:rPr>
-                        <a:t>Service Desk leads</a:t>
+                        <a:t>Team leads</a:t>
                       </a:r>
                     </a:p>
                   </a:txBody>
@@ -18967,7 +18967,7 @@
                           </a:solidFill>
                           <a:latin typeface="Segoe UI"/>
                         </a:rPr>
-                        <a:t>Reassigned out of the Service Desk</a:t>
+                        <a:t>Reassigned to a queue we do not cover</a:t>
                       </a:r>
                     </a:p>
                   </a:txBody>
@@ -21201,7 +21201,7 @@
                 </a:solidFill>
                 <a:latin typeface="Segoe UI"/>
               </a:rPr>
-              <a:t>What we need from the Service Desk</a:t>
+              <a:t>What we need from the teams</a:t>
             </a:r>
           </a:p>
         </p:txBody>
@@ -22656,7 +22656,7 @@
                 </a:solidFill>
                 <a:latin typeface="Segoe UI"/>
               </a:rPr>
-              <a:t>A caller replying does not mean the Service Desk acted. It usually means the opposite.</a:t>
+              <a:t>A caller replying does not mean the assigned team acted. It usually means the opposite.</a:t>
             </a:r>
           </a:p>
           <a:p>
@@ -23207,7 +23207,7 @@
                           </a:solidFill>
                           <a:latin typeface="Segoe UI"/>
                         </a:rPr>
-                        <a:t>Service Desk</a:t>
+                        <a:t>Assigned team</a:t>
                       </a:r>
                     </a:p>
                   </a:txBody>

--- a/docs/Aged_Ticket_Advisor_Detailed.pptx
+++ b/docs/Aged_Ticket_Advisor_Detailed.pptx
@@ -10873,7 +10873,7 @@
                 </a:solidFill>
                 <a:latin typeface="Segoe UI"/>
               </a:rPr>
-              <a:t>Advise</a:t>
+              <a:t>Refresh</a:t>
             </a:r>
           </a:p>
           <a:p>
@@ -10895,7 +10895,7 @@
                 </a:solidFill>
                 <a:latin typeface="Segoe UI"/>
               </a:rPr>
-              <a:t>Language model pass over tickets whose content actually changed. Everything else is served from cache.</a:t>
+              <a:t>Full sync - retires tickets that have been resolved or moved to another team - then a language model pass over whatever actually changed.</a:t>
             </a:r>
           </a:p>
         </p:txBody>
@@ -11118,7 +11118,7 @@
                 </a:solidFill>
                 <a:latin typeface="Segoe UI"/>
               </a:rPr>
-              <a:t>Ranked email to leads, then a short list to each agent.</a:t>
+              <a:t>One ranked email per assignment group to its leads, then a short list to each agent.</a:t>
             </a:r>
           </a:p>
         </p:txBody>
@@ -11341,7 +11341,7 @@
                 </a:solidFill>
                 <a:latin typeface="Segoe UI"/>
               </a:rPr>
-              <a:t>Full sync, retire departed tickets, rebuild the evidence index and resolution baselines.</a:t>
+              <a:t>Rebuild the evidence index and the resolution baselines.</a:t>
             </a:r>
           </a:p>
         </p:txBody>
@@ -17219,7 +17219,7 @@
         <p:spPr>
           <a:xfrm>
             <a:off x="713232" y="1444752"/>
-            <a:ext cx="10765231" cy="352044"/>
+            <a:ext cx="10765231" cy="557784"/>
           </a:xfrm>
           <a:prstGeom prst="rect">
             <a:avLst/>
@@ -17250,7 +17250,7 @@
                 </a:solidFill>
                 <a:latin typeface="Segoe UI"/>
               </a:rPr>
-              <a:t>Sign-in is through Keycloak with your existing account. A new user is a Viewer until somebody says otherwise.</a:t>
+              <a:t>Sign-in is through Keycloak with your existing account. A new user is a Viewer until somebody says otherwise. Everyone sees only the assignment groups they have been given.</a:t>
             </a:r>
           </a:p>
         </p:txBody>
@@ -17264,7 +17264,7 @@
           <p:nvPr/>
         </p:nvGraphicFramePr>
         <p:xfrm>
-          <a:off x="713232" y="1796796"/>
+          <a:off x="713232" y="2002536"/>
           <a:ext cx="10765230" cy="1609344"/>
         </p:xfrm>
         <a:graphic>
@@ -17469,7 +17469,7 @@
                           </a:solidFill>
                           <a:latin typeface="Segoe UI"/>
                         </a:rPr>
-                        <a:t>See the board and tickets for their own queues</a:t>
+                        <a:t>See the board and tickets for their own queues; receive that queue's risk alerts</a:t>
                       </a:r>
                     </a:p>
                   </a:txBody>
@@ -17570,7 +17570,7 @@
                           </a:solidFill>
                           <a:latin typeface="Segoe UI"/>
                         </a:rPr>
-                        <a:t>All of the above, plus record verdicts, snooze, request re-analysis, receive the digest</a:t>
+                        <a:t>All of the above, plus record verdicts, snooze, request re-analysis, receive their queues' digests</a:t>
                       </a:r>
                     </a:p>
                   </a:txBody>
@@ -17671,7 +17671,7 @@
                           </a:solidFill>
                           <a:latin typeface="Segoe UI"/>
                         </a:rPr>
-                        <a:t>All of the above, plus tune weights and approve role requests</a:t>
+                        <a:t>Every queue, plus tune weights, approve role requests, and copied on all outbound mail</a:t>
                       </a:r>
                     </a:p>
                   </a:txBody>
